--- a/iTantra_SIH2026.pptx
+++ b/iTantra_SIH2026.pptx
@@ -928,7 +928,7 @@
                 </a:solidFill>
                 <a:latin typeface="Calibri"/>
               </a:rPr>
-              <a:t xml:space="preserve">≤38B Token</a:t>
+              <a:t xml:space="preserve">UTF-8 Text</a:t>
             </a:r>
           </a:p>
         </p:txBody>
@@ -1346,7 +1346,7 @@
                 </a:solidFill>
                 <a:latin typeface="Calibri"/>
               </a:rPr>
-              <a:t xml:space="preserve">•  Silero pause-detect → dual-engine STT → sentence formation.</a:t>
+              <a:t xml:space="preserve">•  Silero VAD gate → PTT release → dual-engine STT (whisper/conformer).</a:t>
             </a:r>
           </a:p>
           <a:p>
@@ -1360,7 +1360,7 @@
                 </a:solidFill>
                 <a:latin typeface="Calibri"/>
               </a:rPr>
-              <a:t xml:space="preserve">•  Speech → ≤38 B token, ≈0.5 kbps: one UDP packet.</a:t>
+              <a:t xml:space="preserve">•  Speech → UTF-8 transcript: 42 B vs 48,000 B PCM ≈1,100× less data.</a:t>
             </a:r>
           </a:p>
           <a:p>
@@ -1374,7 +1374,7 @@
                 </a:solidFill>
                 <a:latin typeface="Calibri"/>
               </a:rPr>
-              <a:t xml:space="preserve">•  Wi-Fi Direct / BT mesh; ChaCha20 + RS-FEC repair.</a:t>
+              <a:t xml:space="preserve">•  Wi-Fi Direct / BT mesh; ChaCha20-Poly1305 + RS-FEC (K=8/M=4).</a:t>
             </a:r>
           </a:p>
           <a:p>
@@ -1560,7 +1560,16 @@
                 </a:solidFill>
                 <a:latin typeface="Calibri"/>
               </a:rPr>
-              <a:t xml:space="preserve">KEY VALUE PROPOSITION  •  ≈256–512× less RF (0.5 kbps msg vs 128–256 kbps raw)  •  CER 0.03–0.34  •  467 + 15 tests green  •  APK 270 MB  •  CPU-only</a:t>
+              <a:t xml:space="preserve">KEY VALUE PROPOSITION  •  42 B transcript vs 48,000 B PCM ≈1,100× less data  •  CER 0.03–0.34  •  467 + 15 tests green  •  APK 270 MB  •  CPU-only</a:t>
+            </a:r>
+            <a:r>
+              <a:rPr lang="en-US" sz="1000" dirty="0">
+                <a:solidFill>
+                  <a:srgbClr val="FFFFFF"/>
+                </a:solidFill>
+                <a:latin typeface="Calibri"/>
+              </a:rPr>
+              <a:t xml:space="preserve">   [all: Measured, device 3353f694, Sep 2026, India]</a:t>
             </a:r>
           </a:p>
           <a:p>
@@ -1574,7 +1583,7 @@
                 </a:solidFill>
                 <a:latin typeface="Calibri"/>
               </a:rPr>
-              <a:t xml:space="preserve">★ Fine-tuning roadmap: </a:t>
+              <a:t xml:space="preserve">Wire [Measured]: </a:t>
             </a:r>
             <a:r>
               <a:rPr lang="en-US" sz="1100" dirty="0">
@@ -1583,7 +1592,7 @@
                 </a:solidFill>
                 <a:latin typeface="Calibri"/>
               </a:rPr>
-              <a:t xml:space="preserve">P1 shipped (south-indic)  →  P2 Kathbath 1,700 h + Vaani 7,000 h  →  P3 synthetic disaster vocabulary</a:t>
+              <a:t xml:space="preserve">50 B/datagram × 12 FEC shards = 6,600 B TX/msg (11 broadcast dests) ≈7× vs PCM; ≤38 B semantic frame engine-tested (18–24 B) but NOT wired into TX — raw UTF-8 since b51be73. Fine-tune [Target, not yet run]: P1 shipped (south-indic) → P2 Kathbath 1,700 h + Vaani 7,000 h (AI4Bharat/ARTPARK, India) → P3 synthetic disaster vocabulary</a:t>
             </a:r>
           </a:p>
         </p:txBody>
@@ -1843,7 +1852,7 @@
                 </a:solidFill>
                 <a:latin typeface="Calibri"/>
               </a:rPr>
-              <a:t xml:space="preserve">16 kHz PCM  →  Silero VAD  →  Hybrid STT (Conformer / Whisper)  →  Semantic token ≤38 B  →  ChaCha20 + RS-FEC  →  UDP / Wi-Fi Direct / BT  →  TTS  →  Voice / Siren</a:t>
+              <a:t xml:space="preserve">16 kHz PCM  →  Silero VAD  →  Hybrid STT (Conformer / Whisper)  →  UTF-8 transcript  →  ChaCha20-Poly1305 + RS-FEC (K=8, M=4)  →  UDP / Wi-Fi Direct / BT  →  TTS  →  Voice / Siren</a:t>
             </a:r>
           </a:p>
         </p:txBody>
@@ -1956,7 +1965,7 @@
                 </a:solidFill>
                 <a:latin typeface="Calibri"/>
               </a:rPr>
-              <a:t xml:space="preserve">Protobuf frames, Room/SQLite audit log, background queue.</a:t>
+              <a:t xml:space="preserve">hand-rolled binary frames, Room/SQLite audit log, background queue.</a:t>
             </a:r>
           </a:p>
         </p:txBody>
@@ -2037,7 +2046,7 @@
                 </a:solidFill>
                 <a:latin typeface="Calibri"/>
               </a:rPr>
-              <a:t xml:space="preserve">•  38-B frame:   </a:t>
+              <a:t xml:space="preserve">•  Packet:   </a:t>
             </a:r>
             <a:r>
               <a:rPr lang="en-US" sz="1400" dirty="0">
@@ -2046,7 +2055,7 @@
                 </a:solidFill>
                 <a:latin typeface="Calibri"/>
               </a:rPr>
-              <a:t xml:space="preserve">header (node, lang, priority, time) + payload + CRC32.</a:t>
+              <a:t xml:space="preserve">40 B header (magic, ttl, seq, callsigns, shard idx) + RS shard; AEAD tag, no CRC.</a:t>
             </a:r>
           </a:p>
           <a:p>
@@ -2069,7 +2078,7 @@
                 </a:solidFill>
                 <a:latin typeface="Calibri"/>
               </a:rPr>
-              <a:t xml:space="preserve">RS(255,223) burst-loss recovery; Huffman tier; fragmentation.</a:t>
+              <a:t xml:space="preserve">Cauchy RS GF(2⁸) K=8/M=4 — recovers any 4 of 12 shards lost.</a:t>
             </a:r>
           </a:p>
         </p:txBody>
@@ -2366,7 +2375,7 @@
                 </a:solidFill>
                 <a:latin typeface="Calibri"/>
               </a:rPr>
-              <a:t xml:space="preserve">•  ≤38 B payload (code MAX_FRAME_SIZE), ≈0.5 kbps/msg;   </a:t>
+              <a:t xml:space="preserve">•  TX measured on 3353f694: 42 B transcript   </a:t>
             </a:r>
             <a:r>
               <a:rPr lang="en-US" sz="1300" dirty="0">
@@ -2375,7 +2384,7 @@
                 </a:solidFill>
                 <a:latin typeface="Calibri"/>
               </a:rPr>
-              <a:t xml:space="preserve">Dravidian CER 0.05–0.34; hi 0.03.</a:t>
+              <a:t xml:space="preserve">→ 50 B/datagram × 12 FEC shards = 6,600 B/msg (11 broadcast dests) vs 48,000 B PCM ≈7× wire / ≈1,100× at payload.</a:t>
             </a:r>
           </a:p>
           <a:p>
@@ -2389,7 +2398,7 @@
                 </a:solidFill>
                 <a:latin typeface="Calibri"/>
               </a:rPr>
-              <a:t xml:space="preserve">•  APK 270 MB (≤300 cap);   </a:t>
+              <a:t xml:space="preserve">•  ≤38 B frame engine-tested (18–24 B) but NOT in TX;   </a:t>
             </a:r>
             <a:r>
               <a:rPr lang="en-US" sz="1300" dirty="0">
@@ -2398,7 +2407,7 @@
                 </a:solidFill>
                 <a:latin typeface="Calibri"/>
               </a:rPr>
-              <a:t xml:space="preserve">device 3353f694 ADB-verified; CPU-only, power draw Not Yet Tested.</a:t>
+              <a:t xml:space="preserve">raw UTF-8 sent since b51be73 — semantic codes fabricated speech.</a:t>
             </a:r>
           </a:p>
           <a:p>
@@ -2412,7 +2421,7 @@
                 </a:solidFill>
                 <a:latin typeface="Calibri"/>
               </a:rPr>
-              <a:t xml:space="preserve">•  Scales:   </a:t>
+              <a:t xml:space="preserve">•  CER 0.03–0.34 [Measured, STT_GATE_RESULTS.md, Sep 2026];   </a:t>
             </a:r>
             <a:r>
               <a:rPr lang="en-US" sz="1300" dirty="0">
@@ -2421,7 +2430,30 @@
                 </a:solidFill>
                 <a:latin typeface="Calibri"/>
               </a:rPr>
-              <a:t xml:space="preserve">2-node PTT → 10-node team → multi-hop cluster.</a:t>
+              <a:t xml:space="preserve">APK 270 MB (≤300 cap); CPU-only, power draw Not Yet Tested.</a:t>
+            </a:r>
+          </a:p>
+          <a:p>
+            <a:pPr lvl="0" marL="0" indent="0">
+              <a:buNone/>
+            </a:pPr>
+            <a:r>
+              <a:rPr lang="en-US" sz="1300" b="1" dirty="0">
+                <a:solidFill>
+                  <a:srgbClr val="FF6B1A"/>
+                </a:solidFill>
+                <a:latin typeface="Calibri"/>
+              </a:rPr>
+              <a:t xml:space="preserve">•  Scales [Target]:   </a:t>
+            </a:r>
+            <a:r>
+              <a:rPr lang="en-US" sz="1300" dirty="0">
+                <a:solidFill>
+                  <a:srgbClr val="FFFFFF"/>
+                </a:solidFill>
+                <a:latin typeface="Calibri"/>
+              </a:rPr>
+              <a:t xml:space="preserve">2-node PTT → 10-node team → multi-hop; multi-node Not Yet Tested.</a:t>
             </a:r>
           </a:p>
         </p:txBody>
@@ -2479,6 +2511,52 @@
                 </a:solidFill>
                 <a:latin typeface="Calibri"/>
               </a:rPr>
+              <a:t xml:space="preserve">•  TX amplification [Measured] →   </a:t>
+            </a:r>
+            <a:r>
+              <a:rPr lang="en-US" sz="1300" dirty="0">
+                <a:solidFill>
+                  <a:srgbClr val="FFFFFF"/>
+                </a:solidFill>
+                <a:latin typeface="Calibri"/>
+              </a:rPr>
+              <a:t xml:space="preserve">11 broadcast dests × 12 shards = 6.6 kB/msg; fan-out de-dup open.</a:t>
+            </a:r>
+          </a:p>
+          <a:p>
+            <a:pPr lvl="0" marL="0" indent="0">
+              <a:buNone/>
+            </a:pPr>
+            <a:r>
+              <a:rPr lang="en-US" sz="1300" b="1" dirty="0">
+                <a:solidFill>
+                  <a:srgbClr val="FF6B1A"/>
+                </a:solidFill>
+                <a:latin typeface="Calibri"/>
+              </a:rPr>
+              <a:t xml:space="preserve">•  Pause-trigger sentences [Target] →   </a:t>
+            </a:r>
+            <a:r>
+              <a:rPr lang="en-US" sz="1300" dirty="0">
+                <a:solidFill>
+                  <a:srgbClr val="FFFFFF"/>
+                </a:solidFill>
+                <a:latin typeface="Calibri"/>
+              </a:rPr>
+              <a:t xml:space="preserve">not built; PTT release + 10 s silence auto-stop today.</a:t>
+            </a:r>
+          </a:p>
+          <a:p>
+            <a:pPr lvl="0" marL="0" indent="0">
+              <a:buNone/>
+            </a:pPr>
+            <a:r>
+              <a:rPr lang="en-US" sz="1300" b="1" dirty="0">
+                <a:solidFill>
+                  <a:srgbClr val="FF6B1A"/>
+                </a:solidFill>
+                <a:latin typeface="Calibri"/>
+              </a:rPr>
               <a:t xml:space="preserve">•  Small RAM phones →   </a:t>
             </a:r>
             <a:r>
@@ -2525,7 +2603,7 @@
                 </a:solidFill>
                 <a:latin typeface="Calibri"/>
               </a:rPr>
-              <a:t xml:space="preserve">•  Packet loss →   </a:t>
+              <a:t xml:space="preserve">•  Packet loss / collisions →   </a:t>
             </a:r>
             <a:r>
               <a:rPr lang="en-US" sz="1300" dirty="0">
@@ -2534,30 +2612,7 @@
                 </a:solidFill>
                 <a:latin typeface="Calibri"/>
               </a:rPr>
-              <a:t xml:space="preserve">RS-FEC parity + retries + fragmentation.</a:t>
-            </a:r>
-          </a:p>
-          <a:p>
-            <a:pPr lvl="0" marL="0" indent="0">
-              <a:buNone/>
-            </a:pPr>
-            <a:r>
-              <a:rPr lang="en-US" sz="1300" b="1" dirty="0">
-                <a:solidFill>
-                  <a:srgbClr val="FF6B1A"/>
-                </a:solidFill>
-                <a:latin typeface="Calibri"/>
-              </a:rPr>
-              <a:t xml:space="preserve">•  Collisions / noise →   </a:t>
-            </a:r>
-            <a:r>
-              <a:rPr lang="en-US" sz="1300" dirty="0">
-                <a:solidFill>
-                  <a:srgbClr val="FFFFFF"/>
-                </a:solidFill>
-                <a:latin typeface="Calibri"/>
-              </a:rPr>
-              <a:t xml:space="preserve">CSMA/CA channel lock; VAD + noise gate pre-STT.</a:t>
+              <a:t xml:space="preserve">Cauchy RS K=8/M=4 + CSMA/CA channel lock; VAD noise gate.</a:t>
             </a:r>
           </a:p>
         </p:txBody>
@@ -2976,7 +3031,7 @@
                 </a:solidFill>
                 <a:latin typeface="Calibri"/>
               </a:rPr>
-              <a:t xml:space="preserve">≈256–512× less RF (0.5 kbps msg vs 128–256 kbps raw); longer life for existing handsets.</a:t>
+              <a:t xml:space="preserve">≈1,100× less data at payload (42 B vs 48,000 B PCM); wire 6.6 kB/msg incl. FEC; longer handset life.</a:t>
             </a:r>
           </a:p>
           <a:p>
@@ -3329,7 +3384,7 @@
                 </a:solidFill>
                 <a:latin typeface="Calibri"/>
               </a:rPr>
-              <a:t xml:space="preserve">•  Silero VAD — speech gating pre-STT.</a:t>
+              <a:t xml:space="preserve">•  snakers4/silero-vad — speech gating pre-STT; no version string in shipped ONNX.</a:t>
             </a:r>
           </a:p>
         </p:txBody>
@@ -3415,7 +3470,7 @@
                 </a:solidFill>
                 <a:latin typeface="Calibri"/>
               </a:rPr>
-              <a:t xml:space="preserve">•  iTantra audit, Sep 2026: 467 backend + 15 integration tests green; ≤38 B payload.</a:t>
+              <a:t xml:space="preserve">•  iTantra audit, Sep 2026: 467 backend + 15 integration tests green; TX path measured 50 B/datagram × 12 FEC shards.</a:t>
             </a:r>
           </a:p>
           <a:p>

--- a/iTantra_SIH2026.pptx
+++ b/iTantra_SIH2026.pptx
@@ -2375,7 +2375,7 @@
                 </a:solidFill>
                 <a:latin typeface="Calibri"/>
               </a:rPr>
-              <a:t xml:space="preserve">•  TX measured on 3353f694: 42 B transcript   </a:t>
+              <a:t xml:space="preserve">•  TX on 3353f694 (42 B text):   </a:t>
             </a:r>
             <a:r>
               <a:rPr lang="en-US" sz="1300" dirty="0">
@@ -2384,7 +2384,7 @@
                 </a:solidFill>
                 <a:latin typeface="Calibri"/>
               </a:rPr>
-              <a:t xml:space="preserve">→ 50 B/datagram × 12 FEC shards = 6,600 B/msg (11 broadcast dests) vs 48,000 B PCM ≈7× wire / ≈1,100× at payload.</a:t>
+              <a:t xml:space="preserve">50 B/datagram × 12 FEC shards = 6,600 B/msg (11 broadcast dests) vs 48,000 B PCM → ≈7× wire, ≈1,100× payload (English; Indic ≈3 B/char → 500–800×).</a:t>
             </a:r>
           </a:p>
           <a:p>

--- a/iTantra_SIH2026.pptx
+++ b/iTantra_SIH2026.pptx
@@ -198,7 +198,7 @@
                 </a:solidFill>
                 <a:latin typeface="Calibri"/>
               </a:rPr>
-              <a:t xml:space="preserve">SIH 2026  •  PROBLEM STATEMENT ISRO-01  •  TEAM iTANTRA</a:t>
+              <a:t xml:space="preserve">SIH 2026  •  PROBLEM STATEMENT SIH26173  •  TEAM ALGO AVENGERS</a:t>
             </a:r>
           </a:p>
         </p:txBody>
@@ -464,7 +464,7 @@
                 </a:solidFill>
                 <a:latin typeface="Calibri"/>
               </a:rPr>
-              <a:t xml:space="preserve">Team iTantra  •  SIH2026 / ISRO-01  •  1 / 6</a:t>
+              <a:t xml:space="preserve">Algo Avengers  •  SIH26173 / ISRO  •  1 / 6</a:t>
             </a:r>
           </a:p>
         </p:txBody>
@@ -1632,7 +1632,7 @@
                 </a:solidFill>
                 <a:latin typeface="Calibri"/>
               </a:rPr>
-              <a:t xml:space="preserve">Team iTantra  •  SIH2026 / ISRO-01  •  2 / 6</a:t>
+              <a:t xml:space="preserve">Algo Avengers  •  SIH26173 / ISRO  •  2 / 6</a:t>
             </a:r>
           </a:p>
         </p:txBody>
@@ -2118,7 +2118,7 @@
                 </a:solidFill>
                 <a:latin typeface="Calibri"/>
               </a:rPr>
-              <a:t xml:space="preserve">Team iTantra  •  SIH2026 / ISRO-01  •  3 / 6</a:t>
+              <a:t xml:space="preserve">Algo Avengers  •  SIH26173 / ISRO  •  3 / 6</a:t>
             </a:r>
           </a:p>
         </p:txBody>
@@ -2652,7 +2652,7 @@
                 </a:solidFill>
                 <a:latin typeface="Calibri"/>
               </a:rPr>
-              <a:t xml:space="preserve">Team iTantra  •  SIH2026 / ISRO-01  •  4 / 6</a:t>
+              <a:t xml:space="preserve">Algo Avengers  •  SIH26173 / ISRO  •  4 / 6</a:t>
             </a:r>
           </a:p>
         </p:txBody>
@@ -3094,7 +3094,7 @@
                 </a:solidFill>
                 <a:latin typeface="Calibri"/>
               </a:rPr>
-              <a:t xml:space="preserve">Team iTantra  •  SIH2026 / ISRO-01  •  5 / 6</a:t>
+              <a:t xml:space="preserve">Algo Avengers  •  SIH26173 / ISRO  •  5 / 6</a:t>
             </a:r>
           </a:p>
         </p:txBody>
@@ -3524,7 +3524,7 @@
                 </a:solidFill>
                 <a:latin typeface="Calibri"/>
               </a:rPr>
-              <a:t xml:space="preserve">Team iTantra  •  SIH2026 / ISRO-01  •  6 / 6</a:t>
+              <a:t xml:space="preserve">Algo Avengers  •  SIH26173 / ISRO  •  6 / 6</a:t>
             </a:r>
           </a:p>
         </p:txBody>
